--- a/RA3 - Seguretat activa/AA3 - Criptografia/RA3_AA3_Criptografia.pptx
+++ b/RA3 - Seguretat activa/AA3 - Criptografia/RA3_AA3_Criptografia.pptx
@@ -2051,6 +2051,10 @@
           </a:solidFill>
           <a:ln/>
         </p:spPr>
+        <p:txBody>
+          <a:bodyPr/>
+          <a:p/>
+        </p:txBody>
       </p:sp>
       <p:sp>
         <p:nvSpPr>
@@ -2071,6 +2075,10 @@
           </a:solidFill>
           <a:ln/>
         </p:spPr>
+        <p:txBody>
+          <a:bodyPr/>
+          <a:p/>
+        </p:txBody>
       </p:sp>
       <p:sp>
         <p:nvSpPr>
@@ -2496,6 +2504,10 @@
             </a:outerShdw>
           </a:effectLst>
         </p:spPr>
+        <p:txBody>
+          <a:bodyPr/>
+          <a:p/>
+        </p:txBody>
       </p:sp>
       <p:sp>
         <p:nvSpPr>
@@ -2516,6 +2528,10 @@
           </a:solidFill>
           <a:ln/>
         </p:spPr>
+        <p:txBody>
+          <a:bodyPr/>
+          <a:p/>
+        </p:txBody>
       </p:sp>
       <p:pic>
         <p:nvPicPr>
@@ -2655,6 +2671,10 @@
             </a:outerShdw>
           </a:effectLst>
         </p:spPr>
+        <p:txBody>
+          <a:bodyPr/>
+          <a:p/>
+        </p:txBody>
       </p:sp>
       <p:sp>
         <p:nvSpPr>
@@ -2675,6 +2695,10 @@
           </a:solidFill>
           <a:ln/>
         </p:spPr>
+        <p:txBody>
+          <a:bodyPr/>
+          <a:p/>
+        </p:txBody>
       </p:sp>
       <p:pic>
         <p:nvPicPr>
@@ -2814,6 +2838,10 @@
             </a:outerShdw>
           </a:effectLst>
         </p:spPr>
+        <p:txBody>
+          <a:bodyPr/>
+          <a:p/>
+        </p:txBody>
       </p:sp>
       <p:sp>
         <p:nvSpPr>
@@ -2834,6 +2862,10 @@
           </a:solidFill>
           <a:ln/>
         </p:spPr>
+        <p:txBody>
+          <a:bodyPr/>
+          <a:p/>
+        </p:txBody>
       </p:sp>
       <p:pic>
         <p:nvPicPr>
@@ -2961,6 +2993,10 @@
           </a:solidFill>
           <a:ln/>
         </p:spPr>
+        <p:txBody>
+          <a:bodyPr/>
+          <a:p/>
+        </p:txBody>
       </p:sp>
       <p:pic>
         <p:nvPicPr>
@@ -3244,6 +3280,10 @@
           </a:solidFill>
           <a:ln/>
         </p:spPr>
+        <p:txBody>
+          <a:bodyPr/>
+          <a:p/>
+        </p:txBody>
       </p:sp>
       <p:pic>
         <p:nvPicPr>
@@ -3493,6 +3533,10 @@
             </a:outerShdw>
           </a:effectLst>
         </p:spPr>
+        <p:txBody>
+          <a:bodyPr/>
+          <a:p/>
+        </p:txBody>
       </p:sp>
       <p:sp>
         <p:nvSpPr>
@@ -3513,6 +3557,10 @@
           </a:solidFill>
           <a:ln/>
         </p:spPr>
+        <p:txBody>
+          <a:bodyPr/>
+          <a:p/>
+        </p:txBody>
       </p:sp>
       <p:pic>
         <p:nvPicPr>
@@ -3652,6 +3700,10 @@
             </a:outerShdw>
           </a:effectLst>
         </p:spPr>
+        <p:txBody>
+          <a:bodyPr/>
+          <a:p/>
+        </p:txBody>
       </p:sp>
       <p:sp>
         <p:nvSpPr>
@@ -3672,6 +3724,10 @@
           </a:solidFill>
           <a:ln/>
         </p:spPr>
+        <p:txBody>
+          <a:bodyPr/>
+          <a:p/>
+        </p:txBody>
       </p:sp>
       <p:pic>
         <p:nvPicPr>
@@ -3811,6 +3867,10 @@
             </a:outerShdw>
           </a:effectLst>
         </p:spPr>
+        <p:txBody>
+          <a:bodyPr/>
+          <a:p/>
+        </p:txBody>
       </p:sp>
       <p:sp>
         <p:nvSpPr>
@@ -3831,6 +3891,10 @@
           </a:solidFill>
           <a:ln/>
         </p:spPr>
+        <p:txBody>
+          <a:bodyPr/>
+          <a:p/>
+        </p:txBody>
       </p:sp>
       <p:pic>
         <p:nvPicPr>
@@ -4754,7 +4818,7 @@
                 <a:ea typeface="Calibri" pitchFamily="34" charset="-122"/>
                 <a:cs typeface="Calibri" pitchFamily="34" charset="-120"/>
               </a:rPr>
-              <a:t>Llicència Creative Commons BY-NC-SA · Institut Obert de Catalunya, 2011 (materials adaptats i ampliats)</a:t>
+              <a:t>Llicència CC BY-SA 4.0 · Adaptat de "Materials" (SMX-0226SI), Carlos Alonso Martínez, Escola Pia de Mataró</a:t>
             </a:r>
             <a:endParaRPr lang="en-US" sz="1050" dirty="0"/>
           </a:p>
@@ -4981,6 +5045,10 @@
             </a:outerShdw>
           </a:effectLst>
         </p:spPr>
+        <p:txBody>
+          <a:bodyPr/>
+          <a:p/>
+        </p:txBody>
       </p:sp>
       <p:sp>
         <p:nvSpPr>
@@ -5001,6 +5069,10 @@
           </a:solidFill>
           <a:ln/>
         </p:spPr>
+        <p:txBody>
+          <a:bodyPr/>
+          <a:p/>
+        </p:txBody>
       </p:sp>
       <p:pic>
         <p:nvPicPr>
@@ -5140,6 +5212,10 @@
             </a:outerShdw>
           </a:effectLst>
         </p:spPr>
+        <p:txBody>
+          <a:bodyPr/>
+          <a:p/>
+        </p:txBody>
       </p:sp>
       <p:sp>
         <p:nvSpPr>
@@ -5160,6 +5236,10 @@
           </a:solidFill>
           <a:ln/>
         </p:spPr>
+        <p:txBody>
+          <a:bodyPr/>
+          <a:p/>
+        </p:txBody>
       </p:sp>
       <p:pic>
         <p:nvPicPr>
@@ -5299,6 +5379,10 @@
             </a:outerShdw>
           </a:effectLst>
         </p:spPr>
+        <p:txBody>
+          <a:bodyPr/>
+          <a:p/>
+        </p:txBody>
       </p:sp>
       <p:sp>
         <p:nvSpPr>
@@ -5319,6 +5403,10 @@
           </a:solidFill>
           <a:ln/>
         </p:spPr>
+        <p:txBody>
+          <a:bodyPr/>
+          <a:p/>
+        </p:txBody>
       </p:sp>
       <p:pic>
         <p:nvPicPr>
@@ -6149,6 +6237,10 @@
           </a:solidFill>
           <a:ln/>
         </p:spPr>
+        <p:txBody>
+          <a:bodyPr/>
+          <a:p/>
+        </p:txBody>
       </p:sp>
       <p:pic>
         <p:nvPicPr>
@@ -6249,6 +6341,10 @@
             </a:outerShdw>
           </a:effectLst>
         </p:spPr>
+        <p:txBody>
+          <a:bodyPr/>
+          <a:p/>
+        </p:txBody>
       </p:sp>
       <p:sp>
         <p:nvSpPr>
@@ -6269,6 +6365,10 @@
           </a:solidFill>
           <a:ln/>
         </p:spPr>
+        <p:txBody>
+          <a:bodyPr/>
+          <a:p/>
+        </p:txBody>
       </p:sp>
       <p:pic>
         <p:nvPicPr>
@@ -6408,6 +6508,10 @@
             </a:outerShdw>
           </a:effectLst>
         </p:spPr>
+        <p:txBody>
+          <a:bodyPr/>
+          <a:p/>
+        </p:txBody>
       </p:sp>
       <p:sp>
         <p:nvSpPr>
@@ -6428,6 +6532,10 @@
           </a:solidFill>
           <a:ln/>
         </p:spPr>
+        <p:txBody>
+          <a:bodyPr/>
+          <a:p/>
+        </p:txBody>
       </p:sp>
       <p:pic>
         <p:nvPicPr>
@@ -6704,6 +6812,10 @@
           </a:solidFill>
           <a:ln/>
         </p:spPr>
+        <p:txBody>
+          <a:bodyPr/>
+          <a:p/>
+        </p:txBody>
       </p:sp>
       <p:pic>
         <p:nvPicPr>
@@ -6804,6 +6916,10 @@
             </a:outerShdw>
           </a:effectLst>
         </p:spPr>
+        <p:txBody>
+          <a:bodyPr/>
+          <a:p/>
+        </p:txBody>
       </p:sp>
       <p:sp>
         <p:nvSpPr>
@@ -6824,6 +6940,10 @@
           </a:solidFill>
           <a:ln/>
         </p:spPr>
+        <p:txBody>
+          <a:bodyPr/>
+          <a:p/>
+        </p:txBody>
       </p:sp>
       <p:pic>
         <p:nvPicPr>
@@ -6963,6 +7083,10 @@
             </a:outerShdw>
           </a:effectLst>
         </p:spPr>
+        <p:txBody>
+          <a:bodyPr/>
+          <a:p/>
+        </p:txBody>
       </p:sp>
       <p:sp>
         <p:nvSpPr>
@@ -6983,6 +7107,10 @@
           </a:solidFill>
           <a:ln/>
         </p:spPr>
+        <p:txBody>
+          <a:bodyPr/>
+          <a:p/>
+        </p:txBody>
       </p:sp>
       <p:pic>
         <p:nvPicPr>
@@ -7329,6 +7457,10 @@
           </a:solidFill>
           <a:ln/>
         </p:spPr>
+        <p:txBody>
+          <a:bodyPr/>
+          <a:p/>
+        </p:txBody>
       </p:sp>
       <p:pic>
         <p:nvPicPr>
@@ -7612,6 +7744,10 @@
           </a:solidFill>
           <a:ln/>
         </p:spPr>
+        <p:txBody>
+          <a:bodyPr/>
+          <a:p/>
+        </p:txBody>
       </p:sp>
       <p:pic>
         <p:nvPicPr>
@@ -7919,6 +8055,10 @@
           </a:solidFill>
           <a:ln/>
         </p:spPr>
+        <p:txBody>
+          <a:bodyPr/>
+          <a:p/>
+        </p:txBody>
       </p:sp>
       <p:pic>
         <p:nvPicPr>
